--- a/materials/pdf/original/DS09_Folien_Der-Automat-bekommt-ein-Gedaechtnis.pptx
+++ b/materials/pdf/original/DS09_Folien_Der-Automat-bekommt-ein-Gedaechtnis.pptx
@@ -125,19 +125,19 @@
   <p:extLst>
     <p:ext uri="{521415D9-36F7-43E2-AB2F-B90AF26B5E84}">
       <p14:sectionLst xmlns:p14="http://schemas.microsoft.com/office/powerpoint/2010/main">
-        <p14:section name="Start" id="{3fdd287b-53f3-4f68-c2dc-1121b189810c}">
+        <p14:section name="Start" id="{995d1798-bff0-db99-8527-26c14ef05d77}">
           <p14:sldIdLst>
             <p14:sldId id="256"/>
           </p14:sldIdLst>
         </p14:section>
-        <p14:section name="Einstieg" id="{f262df17-358b-7834-0f8a-8858c2ad47cd}">
+        <p14:section name="Einstieg" id="{f61465e6-44b6-a74e-191c-0648be8ad210}">
           <p14:sldIdLst>
             <p14:sldId id="257"/>
             <p14:sldId id="258"/>
             <p14:sldId id="259"/>
           </p14:sldIdLst>
         </p14:section>
-        <p14:section name="Erarbeitung" id="{a324fdd3-e156-da20-48ef-86c49b494e0b}">
+        <p14:section name="Erarbeitung" id="{a37548d9-8930-da61-06e5-a911c0441fe0}">
           <p14:sldIdLst>
             <p14:sldId id="260"/>
             <p14:sldId id="261"/>
@@ -150,20 +150,20 @@
             <p14:sldId id="268"/>
           </p14:sldIdLst>
         </p14:section>
-        <p14:section name="Übung" id="{999389f7-8a70-cd93-ee80-48ea75d071dc}">
+        <p14:section name="Übung" id="{6a36ebf3-6fe5-ef2b-0d59-a5a6f441784e}">
           <p14:sldIdLst>
             <p14:sldId id="269"/>
             <p14:sldId id="270"/>
             <p14:sldId id="271"/>
           </p14:sldIdLst>
         </p14:section>
-        <p14:section name="Sicherung" id="{cd2622d4-62c7-1171-d389-ad2c7bbfe993}">
+        <p14:section name="Sicherung" id="{1ce9e082-806d-c155-1813-14434392737f}">
           <p14:sldIdLst>
             <p14:sldId id="272"/>
             <p14:sldId id="273"/>
           </p14:sldIdLst>
         </p14:section>
-        <p14:section name="Abschluss" id="{5d1c3b8e-f57b-d816-ab21-450de354f3c4}">
+        <p14:section name="Abschluss" id="{61e61902-5d1c-ee82-5f1a-1149d24b0e36}">
           <p14:sldIdLst>
             <p14:sldId id="274"/>
           </p14:sldIdLst>
@@ -836,7 +836,7 @@
           <a:p>
             <a:r>
               <a:rPr lang="en-US" dirty="0"/>
-              <a:t>Erste Zeile: S0 | # | – | –. Spalte 3 = Zeichen, das VOR dem Schritt oben lag. Letzte Zeile: ε-Übergang.</a:t>
+              <a:t>[NUR LEHRKRAFT] Erste Zeile: S0 | # | – | –. Spalte 3 = Zeichen, das VOR dem Schritt oben lag. Letzte Zeile: ε-Übergang.</a:t>
             </a:r>
             <a:endParaRPr lang="en-US" dirty="0"/>
           </a:p>
@@ -924,7 +924,7 @@
           <a:p>
             <a:r>
               <a:rPr lang="en-US" dirty="0"/>
-              <a:t>Bei einem NKA müsste man alle Möglichkeiten prüfen; dieser Automat ist deterministisch, es gibt genau einen Lauf.</a:t>
+              <a:t>[NUR LEHRKRAFT] Bei einem NKA müsste man alle Möglichkeiten prüfen; dieser Automat ist deterministisch, es gibt genau einen Lauf.</a:t>
             </a:r>
             <a:endParaRPr lang="en-US" dirty="0"/>
           </a:p>
@@ -1980,7 +1980,7 @@
           <a:p>
             <a:r>
               <a:rPr lang="en-US" dirty="0"/>
-              <a:t>Erst ausfüllen lassen, dann aufdecken. Belegung immer mit # am Ende.</a:t>
+              <a:t>[NUR LEHRKRAFT] Erst ausfüllen lassen, dann aufdecken. Belegung immer mit # am Ende.</a:t>
             </a:r>
             <a:endParaRPr lang="en-US" dirty="0"/>
           </a:p>
@@ -2156,7 +2156,7 @@
           <a:p>
             <a:r>
               <a:rPr lang="en-US" dirty="0"/>
-              <a:t>Zeilenweise aufdecken. (A, c) : BCA auf AB#: A weg → B#; dann A, C, B ablegen → BCAB#.</a:t>
+              <a:t>[NUR LEHRKRAFT] Zeilenweise aufdecken. (A, c) : BCA auf AB#: A weg → B#; dann A, C, B ablegen → BCAB#.</a:t>
             </a:r>
             <a:endParaRPr lang="en-US" dirty="0"/>
           </a:p>

--- a/materials/pdf/original/DS09_Folien_Der-Automat-bekommt-ein-Gedaechtnis.pptx
+++ b/materials/pdf/original/DS09_Folien_Der-Automat-bekommt-ein-Gedaechtnis.pptx
@@ -125,19 +125,19 @@
   <p:extLst>
     <p:ext uri="{521415D9-36F7-43E2-AB2F-B90AF26B5E84}">
       <p14:sectionLst xmlns:p14="http://schemas.microsoft.com/office/powerpoint/2010/main">
-        <p14:section name="Start" id="{995d1798-bff0-db99-8527-26c14ef05d77}">
+        <p14:section name="Start" id="{f69c1832-84bb-215a-a636-a373621e5b18}">
           <p14:sldIdLst>
             <p14:sldId id="256"/>
           </p14:sldIdLst>
         </p14:section>
-        <p14:section name="Einstieg" id="{f61465e6-44b6-a74e-191c-0648be8ad210}">
+        <p14:section name="Einstieg" id="{d58e7cc8-19a6-ce4a-e32e-21e261f445f9}">
           <p14:sldIdLst>
             <p14:sldId id="257"/>
             <p14:sldId id="258"/>
             <p14:sldId id="259"/>
           </p14:sldIdLst>
         </p14:section>
-        <p14:section name="Erarbeitung" id="{a37548d9-8930-da61-06e5-a911c0441fe0}">
+        <p14:section name="Erarbeitung" id="{37be1cb2-05b9-5ceb-8de1-d17ae333cdd3}">
           <p14:sldIdLst>
             <p14:sldId id="260"/>
             <p14:sldId id="261"/>
@@ -150,20 +150,20 @@
             <p14:sldId id="268"/>
           </p14:sldIdLst>
         </p14:section>
-        <p14:section name="Übung" id="{6a36ebf3-6fe5-ef2b-0d59-a5a6f441784e}">
+        <p14:section name="Übung" id="{739f5083-cdf1-881c-3005-e0ecb8487338}">
           <p14:sldIdLst>
             <p14:sldId id="269"/>
             <p14:sldId id="270"/>
             <p14:sldId id="271"/>
           </p14:sldIdLst>
         </p14:section>
-        <p14:section name="Sicherung" id="{1ce9e082-806d-c155-1813-14434392737f}">
+        <p14:section name="Sicherung" id="{fa0d1824-6ca7-dfa7-14ac-1d58cc8eed5e}">
           <p14:sldIdLst>
             <p14:sldId id="272"/>
             <p14:sldId id="273"/>
           </p14:sldIdLst>
         </p14:section>
-        <p14:section name="Abschluss" id="{61e61902-5d1c-ee82-5f1a-1149d24b0e36}">
+        <p14:section name="Abschluss" id="{a53f52bf-fcfb-7301-f632-ec15fd214fc4}">
           <p14:sldIdLst>
             <p14:sldId id="274"/>
           </p14:sldIdLst>
@@ -2483,6 +2483,45 @@
       </p:sp>
       <p:sp>
         <p:nvSpPr>
+          <p:cNvPr id="4" name="Text 1"/>
+          <p:cNvSpPr/>
+          <p:nvPr/>
+        </p:nvSpPr>
+        <p:spPr>
+          <a:xfrm>
+            <a:off x="7985455" y="6473952"/>
+            <a:ext cx="2926080" cy="274320"/>
+          </a:xfrm>
+          <a:prstGeom prst="rect">
+            <a:avLst/>
+          </a:prstGeom>
+          <a:noFill/>
+          <a:ln/>
+        </p:spPr>
+        <p:txBody>
+          <a:bodyPr wrap="square" lIns="0" tIns="0" rIns="0" bIns="0" rtlCol="0" anchor="ctr"/>
+          <a:lstStyle/>
+          <a:p>
+            <a:pPr algn="r" indent="0" marL="0">
+              <a:buNone/>
+            </a:pPr>
+            <a:r>
+              <a:rPr lang="en-US" sz="1100" dirty="0">
+                <a:solidFill>
+                  <a:srgbClr val="5B6770"/>
+                </a:solidFill>
+                <a:latin typeface="Calibri" pitchFamily="34" charset="0"/>
+                <a:ea typeface="Calibri" pitchFamily="34" charset="-122"/>
+                <a:cs typeface="Calibri" pitchFamily="34" charset="-120"/>
+              </a:rPr>
+              <a:t>CC BY-SA 4.0 · Frank Juchim</a:t>
+            </a:r>
+            <a:endParaRPr lang="en-US" sz="1100" dirty="0"/>
+          </a:p>
+        </p:txBody>
+      </p:sp>
+      <p:sp>
+        <p:nvSpPr>
           <p:cNvPr id="25" name="Slide Number Placeholder 0"/>
           <p:cNvSpPr>
             <a:spLocks noGrp="1"/>
@@ -2634,6 +2673,45 @@
                 <a:cs typeface="Calibri" pitchFamily="34" charset="-120"/>
               </a:rPr>
               <a:t>Level 9 · Welt B · Grenzen &amp; Keller · nur eA (Leistungskurs)</a:t>
+            </a:r>
+            <a:endParaRPr lang="en-US" sz="1100" dirty="0"/>
+          </a:p>
+        </p:txBody>
+      </p:sp>
+      <p:sp>
+        <p:nvSpPr>
+          <p:cNvPr id="4" name="Text 1"/>
+          <p:cNvSpPr/>
+          <p:nvPr/>
+        </p:nvSpPr>
+        <p:spPr>
+          <a:xfrm>
+            <a:off x="7985455" y="6473952"/>
+            <a:ext cx="2926080" cy="274320"/>
+          </a:xfrm>
+          <a:prstGeom prst="rect">
+            <a:avLst/>
+          </a:prstGeom>
+          <a:noFill/>
+          <a:ln/>
+        </p:spPr>
+        <p:txBody>
+          <a:bodyPr wrap="square" lIns="0" tIns="0" rIns="0" bIns="0" rtlCol="0" anchor="ctr"/>
+          <a:lstStyle/>
+          <a:p>
+            <a:pPr algn="r" indent="0" marL="0">
+              <a:buNone/>
+            </a:pPr>
+            <a:r>
+              <a:rPr lang="en-US" sz="1100" dirty="0">
+                <a:solidFill>
+                  <a:srgbClr val="5B6770"/>
+                </a:solidFill>
+                <a:latin typeface="Calibri" pitchFamily="34" charset="0"/>
+                <a:ea typeface="Calibri" pitchFamily="34" charset="-122"/>
+                <a:cs typeface="Calibri" pitchFamily="34" charset="-120"/>
+              </a:rPr>
+              <a:t>CC BY-SA 4.0 · Frank Juchim</a:t>
             </a:r>
             <a:endParaRPr lang="en-US" sz="1100" dirty="0"/>
           </a:p>
